--- a/templates/posts/october/01-10-2026-thu-li-boubacar-option-a-green.pptx
+++ b/templates/posts/october/01-10-2026-thu-li-boubacar-option-a-green.pptx
@@ -3518,7 +3518,7 @@
       <p:grpSpPr/>
       <p:pic>
         <p:nvPicPr>
-          <p:cNvPr id="2" name="Picture 1" descr="2678139057228704916.jpg"/>
+          <p:cNvPr id="2" name="Picture 1" descr="5832940680456227572.jpg"/>
           <p:cNvPicPr>
             <a:picLocks noChangeAspect="1"/>
           </p:cNvPicPr>

--- a/templates/posts/october/01-10-2026-thu-li-boubacar-option-a-green.pptx
+++ b/templates/posts/october/01-10-2026-thu-li-boubacar-option-a-green.pptx
@@ -3518,7 +3518,7 @@
       <p:grpSpPr/>
       <p:pic>
         <p:nvPicPr>
-          <p:cNvPr id="2" name="Picture 1" descr="5832940680456227572.jpg"/>
+          <p:cNvPr id="2" name="Picture 1" descr="9202951278880388205.jpg"/>
           <p:cNvPicPr>
             <a:picLocks noChangeAspect="1"/>
           </p:cNvPicPr>

--- a/templates/posts/october/01-10-2026-thu-li-boubacar-option-a-green.pptx
+++ b/templates/posts/october/01-10-2026-thu-li-boubacar-option-a-green.pptx
@@ -3518,7 +3518,7 @@
       <p:grpSpPr/>
       <p:pic>
         <p:nvPicPr>
-          <p:cNvPr id="2" name="Picture 1" descr="9202951278880388205.jpg"/>
+          <p:cNvPr id="2" name="Picture 1" descr="6220114732621942813.jpg"/>
           <p:cNvPicPr>
             <a:picLocks noChangeAspect="1"/>
           </p:cNvPicPr>

--- a/templates/posts/october/01-10-2026-thu-li-boubacar-option-a-green.pptx
+++ b/templates/posts/october/01-10-2026-thu-li-boubacar-option-a-green.pptx
@@ -3518,7 +3518,7 @@
       <p:grpSpPr/>
       <p:pic>
         <p:nvPicPr>
-          <p:cNvPr id="2" name="Picture 1" descr="6220114732621942813.jpg"/>
+          <p:cNvPr id="2" name="Picture 1" descr="8633098880984446110.jpg"/>
           <p:cNvPicPr>
             <a:picLocks noChangeAspect="1"/>
           </p:cNvPicPr>

--- a/templates/posts/october/01-10-2026-thu-li-boubacar-option-a-green.pptx
+++ b/templates/posts/october/01-10-2026-thu-li-boubacar-option-a-green.pptx
@@ -3518,7 +3518,7 @@
       <p:grpSpPr/>
       <p:pic>
         <p:nvPicPr>
-          <p:cNvPr id="2" name="Picture 1" descr="8633098880984446110.jpg"/>
+          <p:cNvPr id="2" name="Picture 1" descr="4851953630791355537.jpg"/>
           <p:cNvPicPr>
             <a:picLocks noChangeAspect="1"/>
           </p:cNvPicPr>

--- a/templates/posts/october/01-10-2026-thu-li-boubacar-option-a-green.pptx
+++ b/templates/posts/october/01-10-2026-thu-li-boubacar-option-a-green.pptx
@@ -3518,7 +3518,7 @@
       <p:grpSpPr/>
       <p:pic>
         <p:nvPicPr>
-          <p:cNvPr id="2" name="Picture 1" descr="4851953630791355537.jpg"/>
+          <p:cNvPr id="2" name="Picture 1" descr="7226360565225996189.jpg"/>
           <p:cNvPicPr>
             <a:picLocks noChangeAspect="1"/>
           </p:cNvPicPr>

--- a/templates/posts/october/01-10-2026-thu-li-boubacar-option-a-green.pptx
+++ b/templates/posts/october/01-10-2026-thu-li-boubacar-option-a-green.pptx
@@ -3518,7 +3518,7 @@
       <p:grpSpPr/>
       <p:pic>
         <p:nvPicPr>
-          <p:cNvPr id="2" name="Picture 1" descr="7226360565225996189.jpg"/>
+          <p:cNvPr id="2" name="Picture 1" descr="4701462691474322721.jpg"/>
           <p:cNvPicPr>
             <a:picLocks noChangeAspect="1"/>
           </p:cNvPicPr>
